--- a/Lesson11-Critic/Lesson11-Critic.pptx
+++ b/Lesson11-Critic/Lesson11-Critic.pptx
@@ -951,7 +951,7 @@
           <a:p>
             <a:r>
               <a:rPr lang="en-US" dirty="0"/>
-              <a:t>This is the critic's full prompt template, shown exactly as it appears in the code, typos included. Notice three things. First, the roles: instead of a ChatHistory with separate system and user messages, the words System and User are written straight into one template string, which is sent as a single prompt. Second, the rubric: three numbered criteria, reliability, performance and best practices, each with a short guiding question. Third, the output format: the prompt asks for exactly four labelled fields, SCORE from zero to ten, PROS, CONS and a FIX with a corrected version of the code. The snippet itself goes into the input placeholder at the end. The model follows this layout because it was told to, not because anything checks it.</a:t>
+              <a:t>This is the critic's full prompt template, shown exactly as it appears in the code. Notice three things. First, the roles: instead of a ChatHistory with separate system and user messages, the words System and User are written straight into one template string, which is sent as a single prompt. Second, the rubric: three numbered criteria, reliability, performance and best practices, each with a short guiding question. Third, the output format: the prompt asks for exactly four labelled fields, SCORE from zero to ten, PROS, CONS and a FIX with a corrected version of the code. The snippet itself goes into the input placeholder at the end. The model follows this layout because it was told to, not because anything checks it.</a:t>
             </a:r>
             <a:endParaRPr lang="en-US" dirty="0"/>
           </a:p>
@@ -6302,7 +6302,7 @@
                 <a:ea typeface="Courier New" pitchFamily="34" charset="-122"/>
                 <a:cs typeface="Courier New" pitchFamily="34" charset="-120"/>
               </a:rPr>
-              <a:t>2. Performane (Is it efficient?)</a:t>
+              <a:t>2. Performance (Is it efficient?)</a:t>
             </a:r>
             <a:endParaRPr lang="en-US" sz="1000" dirty="0"/>
           </a:p>
@@ -6387,7 +6387,7 @@
                 <a:ea typeface="Courier New" pitchFamily="34" charset="-122"/>
                 <a:cs typeface="Courier New" pitchFamily="34" charset="-120"/>
               </a:rPr>
-              <a:t>PROS: [List hightlights]</a:t>
+              <a:t>PROS: [List highlights]</a:t>
             </a:r>
             <a:endParaRPr lang="en-US" sz="1000" dirty="0"/>
           </a:p>
